--- a/NanoVNA_Handbok_Presentation.pptx
+++ b/NanoVNA_Handbok_Presentation.pptx
@@ -2347,53 +2347,14 @@
       </p:sp>
       <p:sp>
         <p:nvSpPr>
-          <p:cNvPr id="28" name="Shape 26"/>
+          <p:cNvPr id="29" name="Text 27"/>
           <p:cNvSpPr/>
           <p:nvPr/>
         </p:nvSpPr>
         <p:spPr>
           <a:xfrm>
             <a:off x="502920" y="4160520"/>
-            <a:ext cx="2743200" cy="475488"/>
-          </a:xfrm>
-          <a:prstGeom prst="rect">
-            <a:avLst/>
-          </a:prstGeom>
-          <a:solidFill>
-            <a:srgbClr val="243B55"/>
-          </a:solidFill>
-          <a:ln w="12700">
-            <a:solidFill>
-              <a:srgbClr val="1E6FA5"/>
-            </a:solidFill>
-            <a:prstDash val="solid"/>
-          </a:ln>
-          <a:effectLst>
-            <a:outerShdw blurRad="101600" dist="38100" dir="8100000" algn="bl" rotWithShape="0">
-              <a:srgbClr val="000000">
-                <a:alpha val="18000"/>
-              </a:srgbClr>
-            </a:outerShdw>
-          </a:effectLst>
-        </p:spPr>
-        <p:txBody>
-          <a:bodyPr/>
-          <a:lstStyle/>
-          <a:p>
-            <a:endParaRPr lang="sv-SE"/>
-          </a:p>
-        </p:txBody>
-      </p:sp>
-      <p:sp>
-        <p:nvSpPr>
-          <p:cNvPr id="29" name="Text 27"/>
-          <p:cNvSpPr/>
-          <p:nvPr/>
-        </p:nvSpPr>
-        <p:spPr>
-          <a:xfrm>
-            <a:off x="502920" y="4160520"/>
-            <a:ext cx="2743200" cy="475488"/>
+            <a:ext cx="2323407" cy="475488"/>
           </a:xfrm>
           <a:prstGeom prst="rect">
             <a:avLst/>
@@ -2411,15 +2372,112 @@
             <a:r>
               <a:rPr lang="en-US" sz="1200" dirty="0">
                 <a:solidFill>
-                  <a:srgbClr val="DDE6EF"/>
-                </a:solidFill>
-                <a:latin typeface="Calibri" pitchFamily="34" charset="0"/>
-                <a:ea typeface="Calibri" pitchFamily="34" charset="-122"/>
-                <a:cs typeface="Calibri" pitchFamily="34" charset="-120"/>
-              </a:rPr>
-              <a:t>📥  Gratis nedladdning på GitHub</a:t>
-            </a:r>
-            <a:endParaRPr lang="en-US" sz="1200" dirty="0"/>
+                  <a:schemeClr val="bg1"/>
+                </a:solidFill>
+                <a:latin typeface="Calibri" pitchFamily="34" charset="0"/>
+                <a:ea typeface="Calibri" pitchFamily="34" charset="-122"/>
+                <a:cs typeface="Calibri" pitchFamily="34" charset="-120"/>
+              </a:rPr>
+              <a:t>📥  </a:t>
+            </a:r>
+            <a:r>
+              <a:rPr lang="en-US" sz="1200" dirty="0">
+                <a:solidFill>
+                  <a:schemeClr val="bg1"/>
+                </a:solidFill>
+                <a:latin typeface="Calibri" pitchFamily="34" charset="0"/>
+                <a:ea typeface="Calibri" pitchFamily="34" charset="-122"/>
+                <a:cs typeface="Calibri" pitchFamily="34" charset="-120"/>
+                <a:hlinkClick r:id="rId3">
+                  <a:extLst>
+                    <a:ext uri="{A12FA001-AC4F-418D-AE19-62706E023703}">
+                      <ahyp:hlinkClr xmlns:ahyp="http://schemas.microsoft.com/office/drawing/2018/hyperlinkcolor" val="tx"/>
+                    </a:ext>
+                  </a:extLst>
+                </a:hlinkClick>
+              </a:rPr>
+              <a:t>Gratis </a:t>
+            </a:r>
+            <a:r>
+              <a:rPr lang="en-US" sz="1200" dirty="0" err="1">
+                <a:solidFill>
+                  <a:schemeClr val="bg1"/>
+                </a:solidFill>
+                <a:latin typeface="Calibri" pitchFamily="34" charset="0"/>
+                <a:ea typeface="Calibri" pitchFamily="34" charset="-122"/>
+                <a:cs typeface="Calibri" pitchFamily="34" charset="-120"/>
+                <a:hlinkClick r:id="rId3">
+                  <a:extLst>
+                    <a:ext uri="{A12FA001-AC4F-418D-AE19-62706E023703}">
+                      <ahyp:hlinkClr xmlns:ahyp="http://schemas.microsoft.com/office/drawing/2018/hyperlinkcolor" val="tx"/>
+                    </a:ext>
+                  </a:extLst>
+                </a:hlinkClick>
+              </a:rPr>
+              <a:t>nedladdning</a:t>
+            </a:r>
+            <a:r>
+              <a:rPr lang="en-US" sz="1200" dirty="0">
+                <a:solidFill>
+                  <a:schemeClr val="bg1"/>
+                </a:solidFill>
+                <a:latin typeface="Calibri" pitchFamily="34" charset="0"/>
+                <a:ea typeface="Calibri" pitchFamily="34" charset="-122"/>
+                <a:cs typeface="Calibri" pitchFamily="34" charset="-120"/>
+                <a:hlinkClick r:id="rId3">
+                  <a:extLst>
+                    <a:ext uri="{A12FA001-AC4F-418D-AE19-62706E023703}">
+                      <ahyp:hlinkClr xmlns:ahyp="http://schemas.microsoft.com/office/drawing/2018/hyperlinkcolor" val="tx"/>
+                    </a:ext>
+                  </a:extLst>
+                </a:hlinkClick>
+              </a:rPr>
+              <a:t> </a:t>
+            </a:r>
+            <a:r>
+              <a:rPr lang="en-US" sz="1200" dirty="0" err="1">
+                <a:solidFill>
+                  <a:schemeClr val="bg1"/>
+                </a:solidFill>
+                <a:latin typeface="Calibri" pitchFamily="34" charset="0"/>
+                <a:ea typeface="Calibri" pitchFamily="34" charset="-122"/>
+                <a:cs typeface="Calibri" pitchFamily="34" charset="-120"/>
+                <a:hlinkClick r:id="rId3">
+                  <a:extLst>
+                    <a:ext uri="{A12FA001-AC4F-418D-AE19-62706E023703}">
+                      <ahyp:hlinkClr xmlns:ahyp="http://schemas.microsoft.com/office/drawing/2018/hyperlinkcolor" val="tx"/>
+                    </a:ext>
+                  </a:extLst>
+                </a:hlinkClick>
+              </a:rPr>
+              <a:t>på</a:t>
+            </a:r>
+            <a:r>
+              <a:rPr lang="en-US" sz="1200" dirty="0">
+                <a:solidFill>
+                  <a:schemeClr val="bg1"/>
+                </a:solidFill>
+                <a:latin typeface="Calibri" pitchFamily="34" charset="0"/>
+                <a:ea typeface="Calibri" pitchFamily="34" charset="-122"/>
+                <a:cs typeface="Calibri" pitchFamily="34" charset="-120"/>
+                <a:hlinkClick r:id="rId3">
+                  <a:extLst>
+                    <a:ext uri="{A12FA001-AC4F-418D-AE19-62706E023703}">
+                      <ahyp:hlinkClr xmlns:ahyp="http://schemas.microsoft.com/office/drawing/2018/hyperlinkcolor" val="tx"/>
+                    </a:ext>
+                  </a:extLst>
+                </a:hlinkClick>
+              </a:rPr>
+              <a:t> GitHub</a:t>
+            </a:r>
+            <a:endParaRPr lang="en-US" sz="1200" dirty="0">
+              <a:solidFill>
+                <a:schemeClr val="bg1"/>
+              </a:solidFill>
+              <a:latin typeface="Calibri" pitchFamily="34" charset="0"/>
+              <a:ea typeface="Calibri" pitchFamily="34" charset="-122"/>
+              <a:cs typeface="Calibri" pitchFamily="34" charset="-120"/>
+            </a:endParaRPr>
           </a:p>
         </p:txBody>
       </p:sp>
@@ -2675,21 +2733,51 @@
           <a:bodyPr wrap="square" lIns="0" tIns="0" rIns="0" bIns="0" rtlCol="0" anchor="ctr"/>
           <a:lstStyle/>
           <a:p>
-            <a:pPr marL="0" indent="0">
-              <a:buNone/>
-            </a:pPr>
             <a:r>
               <a:rPr lang="en-US" sz="2800" dirty="0">
                 <a:solidFill>
-                  <a:srgbClr val="E8A020"/>
-                </a:solidFill>
-                <a:latin typeface="Calibri" pitchFamily="34" charset="0"/>
-                <a:ea typeface="Calibri" pitchFamily="34" charset="-122"/>
-                <a:cs typeface="Calibri" pitchFamily="34" charset="-120"/>
+                  <a:schemeClr val="bg1"/>
+                </a:solidFill>
+                <a:latin typeface="Calibri" pitchFamily="34" charset="0"/>
+                <a:ea typeface="Calibri" pitchFamily="34" charset="-122"/>
+                <a:cs typeface="Calibri" pitchFamily="34" charset="-120"/>
+              </a:rPr>
+              <a:t>📥</a:t>
+            </a:r>
+            <a:r>
+              <a:rPr lang="en-US" sz="2800" dirty="0">
+                <a:solidFill>
+                  <a:schemeClr val="accent4"/>
+                </a:solidFill>
+                <a:latin typeface="Calibri" pitchFamily="34" charset="0"/>
+                <a:ea typeface="Calibri" pitchFamily="34" charset="-122"/>
+                <a:cs typeface="Calibri" pitchFamily="34" charset="-120"/>
+              </a:rPr>
+              <a:t>  </a:t>
+            </a:r>
+            <a:r>
+              <a:rPr lang="en-US" sz="2800" dirty="0">
+                <a:solidFill>
+                  <a:schemeClr val="accent4"/>
+                </a:solidFill>
+                <a:latin typeface="Calibri" pitchFamily="34" charset="0"/>
+                <a:ea typeface="Calibri" pitchFamily="34" charset="-122"/>
+                <a:cs typeface="Calibri" pitchFamily="34" charset="-120"/>
+                <a:hlinkClick r:id="rId3">
+                  <a:extLst>
+                    <a:ext uri="{A12FA001-AC4F-418D-AE19-62706E023703}">
+                      <ahyp:hlinkClr xmlns:ahyp="http://schemas.microsoft.com/office/drawing/2018/hyperlinkcolor" val="tx"/>
+                    </a:ext>
+                  </a:extLst>
+                </a:hlinkClick>
               </a:rPr>
               <a:t>gratis på GitHub</a:t>
             </a:r>
-            <a:endParaRPr lang="en-US" sz="2800" dirty="0"/>
+            <a:endParaRPr lang="en-US" sz="2800" dirty="0">
+              <a:solidFill>
+                <a:schemeClr val="accent4"/>
+              </a:solidFill>
+            </a:endParaRPr>
           </a:p>
         </p:txBody>
       </p:sp>
@@ -2824,7 +2912,18 @@
                 <a:ea typeface="Calibri" pitchFamily="34" charset="-122"/>
                 <a:cs typeface="Calibri" pitchFamily="34" charset="-120"/>
               </a:rPr>
-              <a:t>Version 4 – omarbetad och utökad</a:t>
+              <a:t>Version 4 – omarbetad och </a:t>
+            </a:r>
+            <a:r>
+              <a:rPr lang="en-US" sz="1400" dirty="0" err="1">
+                <a:solidFill>
+                  <a:srgbClr val="DDE6EF"/>
+                </a:solidFill>
+                <a:latin typeface="Calibri" pitchFamily="34" charset="0"/>
+                <a:ea typeface="Calibri" pitchFamily="34" charset="-122"/>
+                <a:cs typeface="Calibri" pitchFamily="34" charset="-120"/>
+              </a:rPr>
+              <a:t>utökad</a:t>
             </a:r>
             <a:endParaRPr lang="en-US" sz="1400" dirty="0"/>
           </a:p>
@@ -3129,8 +3228,8 @@
         </p:nvSpPr>
         <p:spPr>
           <a:xfrm>
-            <a:off x="777240" y="3538728"/>
-            <a:ext cx="3931920" cy="347472"/>
+            <a:off x="777239" y="3538728"/>
+            <a:ext cx="7635241" cy="347472"/>
           </a:xfrm>
           <a:prstGeom prst="rect">
             <a:avLst/>
@@ -3154,9 +3253,30 @@
                 <a:ea typeface="Calibri" pitchFamily="34" charset="-122"/>
                 <a:cs typeface="Calibri" pitchFamily="34" charset="-120"/>
               </a:rPr>
-              <a:t>Uppdateras löpande på GitHub</a:t>
-            </a:r>
-            <a:endParaRPr lang="en-US" sz="1400" dirty="0"/>
+              <a:t>Uppdateras löpande </a:t>
+            </a:r>
+            <a:r>
+              <a:rPr lang="en-US" sz="1400" dirty="0" err="1">
+                <a:solidFill>
+                  <a:srgbClr val="DDE6EF"/>
+                </a:solidFill>
+                <a:latin typeface="Calibri" pitchFamily="34" charset="0"/>
+                <a:ea typeface="Calibri" pitchFamily="34" charset="-122"/>
+                <a:cs typeface="Calibri" pitchFamily="34" charset="-120"/>
+              </a:rPr>
+              <a:t>på</a:t>
+            </a:r>
+            <a:r>
+              <a:rPr lang="en-US" sz="1400" dirty="0">
+                <a:solidFill>
+                  <a:srgbClr val="DDE6EF"/>
+                </a:solidFill>
+                <a:latin typeface="Calibri" pitchFamily="34" charset="0"/>
+                <a:ea typeface="Calibri" pitchFamily="34" charset="-122"/>
+                <a:cs typeface="Calibri" pitchFamily="34" charset="-120"/>
+              </a:rPr>
+              <a:t> GitHub</a:t>
+            </a:r>
           </a:p>
         </p:txBody>
       </p:sp>
